--- a/docs/lectures/04_08_lecture/lake_superior_ice.pptx
+++ b/docs/lectures/04_08_lecture/lake_superior_ice.pptx
@@ -3357,7 +3357,7 @@
             </a:pPr>
             <a:r>
               <a:rPr/>
-              <a:t>2026-07-02</a:t>
+              <a:t>2026-07-03</a:t>
             </a:r>
           </a:p>
         </p:txBody>
